--- a/ProyectoFinal/docs/Proyecto Final Visión Por Computador.pptx
+++ b/ProyectoFinal/docs/Proyecto Final Visión Por Computador.pptx
@@ -110,6 +110,11 @@
       </a:defRPr>
     </a:lvl9pPr>
   </p:defaultTextStyle>
+  <p:extLst>
+    <p:ext uri="{EFAFB233-063F-42B5-8137-9DF3F51BA10A}">
+      <p15:sldGuideLst xmlns:p15="http://schemas.microsoft.com/office/powerpoint/2012/main"/>
+    </p:ext>
+  </p:extLst>
 </p:presentation>
 </file>
 
@@ -14492,7 +14497,7 @@
                 </a:ln>
                 <a:effectLst/>
               </a:rPr>
-              <a:t>of</a:t>
+              <a:t>from</a:t>
             </a:r>
             <a:r>
               <a:rPr kumimoji="0" lang="es-ES" altLang="es-ES" i="0" u="none" strike="noStrike" cap="none" normalizeH="0" baseline="0" dirty="0">
@@ -14510,7 +14515,25 @@
                 </a:ln>
                 <a:effectLst/>
               </a:rPr>
-              <a:t>good</a:t>
+              <a:t>the</a:t>
+            </a:r>
+            <a:r>
+              <a:rPr kumimoji="0" lang="es-ES" altLang="es-ES" i="0" u="none" strike="noStrike" cap="none" normalizeH="0" baseline="0" dirty="0">
+                <a:ln>
+                  <a:noFill/>
+                </a:ln>
+                <a:effectLst/>
+              </a:rPr>
+              <a:t> folder </a:t>
+            </a:r>
+            <a:r>
+              <a:rPr kumimoji="0" lang="es-ES" altLang="es-ES" i="0" u="none" strike="noStrike" cap="none" normalizeH="0" baseline="0" dirty="0" err="1">
+                <a:ln>
+                  <a:noFill/>
+                </a:ln>
+                <a:effectLst/>
+              </a:rPr>
+              <a:t>with</a:t>
             </a:r>
             <a:r>
               <a:rPr kumimoji="0" lang="es-ES" altLang="es-ES" i="0" u="none" strike="noStrike" cap="none" normalizeH="0" baseline="0" dirty="0">
@@ -14528,7 +14551,7 @@
                 </a:ln>
                 <a:effectLst/>
               </a:rPr>
-              <a:t>cones</a:t>
+              <a:t>the</a:t>
             </a:r>
             <a:r>
               <a:rPr kumimoji="0" lang="es-ES" altLang="es-ES" i="0" u="none" strike="noStrike" cap="none" normalizeH="0" baseline="0" dirty="0">
@@ -14540,22 +14563,67 @@
               <a:t> </a:t>
             </a:r>
             <a:r>
-              <a:rPr kumimoji="0" lang="es-ES" altLang="es-ES" b="0" i="0" u="none" strike="noStrike" cap="none" normalizeH="0" baseline="0" dirty="0">
+              <a:rPr kumimoji="0" lang="es-ES" altLang="es-ES" i="0" u="none" strike="noStrike" cap="none" normalizeH="0" baseline="0" dirty="0" err="1">
                 <a:ln>
                   <a:noFill/>
                 </a:ln>
                 <a:effectLst/>
               </a:rPr>
-              <a:t>are </a:t>
-            </a:r>
-            <a:r>
-              <a:rPr kumimoji="0" lang="es-ES" altLang="es-ES" b="0" i="0" u="none" strike="noStrike" cap="none" normalizeH="0" baseline="0" dirty="0" err="1">
+              <a:t>good</a:t>
+            </a:r>
+            <a:r>
+              <a:rPr kumimoji="0" lang="es-ES" altLang="es-ES" i="0" u="none" strike="noStrike" cap="none" normalizeH="0" baseline="0" dirty="0">
                 <a:ln>
                   <a:noFill/>
                 </a:ln>
                 <a:effectLst/>
               </a:rPr>
-              <a:t>generated</a:t>
+              <a:t> </a:t>
+            </a:r>
+            <a:r>
+              <a:rPr kumimoji="0" lang="es-ES" altLang="es-ES" i="0" u="none" strike="noStrike" cap="none" normalizeH="0" baseline="0" dirty="0" err="1">
+                <a:ln>
+                  <a:noFill/>
+                </a:ln>
+                <a:effectLst/>
+              </a:rPr>
+              <a:t>cones</a:t>
+            </a:r>
+            <a:r>
+              <a:rPr kumimoji="0" lang="es-ES" altLang="es-ES" i="0" u="none" strike="noStrike" cap="none" normalizeH="0" baseline="0" dirty="0">
+                <a:ln>
+                  <a:noFill/>
+                </a:ln>
+                <a:effectLst/>
+              </a:rPr>
+              <a:t> </a:t>
+            </a:r>
+            <a:r>
+              <a:rPr kumimoji="0" lang="es-ES" altLang="es-ES" i="0" u="none" strike="noStrike" cap="none" normalizeH="0" baseline="0" dirty="0" err="1">
+                <a:ln>
+                  <a:noFill/>
+                </a:ln>
+                <a:effectLst/>
+              </a:rPr>
+              <a:t>is</a:t>
+            </a:r>
+            <a:r>
+              <a:rPr kumimoji="0" lang="es-ES" altLang="es-ES" i="0" u="none" strike="noStrike" cap="none" normalizeH="0" baseline="0" dirty="0">
+                <a:ln>
+                  <a:noFill/>
+                </a:ln>
+                <a:effectLst/>
+              </a:rPr>
+              <a:t> </a:t>
+            </a:r>
+            <a:r>
+              <a:rPr kumimoji="0" lang="es-ES" altLang="es-ES" i="0" u="none" strike="noStrike" cap="none" normalizeH="0" baseline="0" dirty="0" err="1">
+                <a:ln>
+                  <a:noFill/>
+                </a:ln>
+                <a:effectLst/>
+              </a:rPr>
+              <a:t>taken</a:t>
             </a:r>
             <a:endParaRPr kumimoji="0" lang="es-ES" altLang="es-ES" b="0" i="0" u="none" strike="noStrike" cap="none" normalizeH="0" baseline="0" dirty="0">
               <a:ln>
